--- a/ATOM_scripts_lecture/Intro2atom.pptx
+++ b/ATOM_scripts_lecture/Intro2atom.pptx
@@ -336,7 +336,7 @@
           <a:p>
             <a:fld id="{935ADB13-AEC1-AB45-83FA-9336A02F6639}" type="datetimeFigureOut">
               <a:rPr lang="sv-SE" smtClean="0"/>
-              <a:t>2025-04-24</a:t>
+              <a:t>2026-02-26</a:t>
             </a:fld>
             <a:endParaRPr lang="sv-SE"/>
           </a:p>
@@ -504,7 +504,7 @@
           <a:p>
             <a:fld id="{935ADB13-AEC1-AB45-83FA-9336A02F6639}" type="datetimeFigureOut">
               <a:rPr lang="sv-SE" smtClean="0"/>
-              <a:t>2025-04-24</a:t>
+              <a:t>2026-02-26</a:t>
             </a:fld>
             <a:endParaRPr lang="sv-SE"/>
           </a:p>
@@ -682,7 +682,7 @@
           <a:p>
             <a:fld id="{935ADB13-AEC1-AB45-83FA-9336A02F6639}" type="datetimeFigureOut">
               <a:rPr lang="sv-SE" smtClean="0"/>
-              <a:t>2025-04-24</a:t>
+              <a:t>2026-02-26</a:t>
             </a:fld>
             <a:endParaRPr lang="sv-SE"/>
           </a:p>
@@ -850,7 +850,7 @@
           <a:p>
             <a:fld id="{935ADB13-AEC1-AB45-83FA-9336A02F6639}" type="datetimeFigureOut">
               <a:rPr lang="sv-SE" smtClean="0"/>
-              <a:t>2025-04-24</a:t>
+              <a:t>2026-02-26</a:t>
             </a:fld>
             <a:endParaRPr lang="sv-SE"/>
           </a:p>
@@ -1095,7 +1095,7 @@
           <a:p>
             <a:fld id="{935ADB13-AEC1-AB45-83FA-9336A02F6639}" type="datetimeFigureOut">
               <a:rPr lang="sv-SE" smtClean="0"/>
-              <a:t>2025-04-24</a:t>
+              <a:t>2026-02-26</a:t>
             </a:fld>
             <a:endParaRPr lang="sv-SE"/>
           </a:p>
@@ -1380,7 +1380,7 @@
           <a:p>
             <a:fld id="{935ADB13-AEC1-AB45-83FA-9336A02F6639}" type="datetimeFigureOut">
               <a:rPr lang="sv-SE" smtClean="0"/>
-              <a:t>2025-04-24</a:t>
+              <a:t>2026-02-26</a:t>
             </a:fld>
             <a:endParaRPr lang="sv-SE"/>
           </a:p>
@@ -1799,7 +1799,7 @@
           <a:p>
             <a:fld id="{935ADB13-AEC1-AB45-83FA-9336A02F6639}" type="datetimeFigureOut">
               <a:rPr lang="sv-SE" smtClean="0"/>
-              <a:t>2025-04-24</a:t>
+              <a:t>2026-02-26</a:t>
             </a:fld>
             <a:endParaRPr lang="sv-SE"/>
           </a:p>
@@ -1916,7 +1916,7 @@
           <a:p>
             <a:fld id="{935ADB13-AEC1-AB45-83FA-9336A02F6639}" type="datetimeFigureOut">
               <a:rPr lang="sv-SE" smtClean="0"/>
-              <a:t>2025-04-24</a:t>
+              <a:t>2026-02-26</a:t>
             </a:fld>
             <a:endParaRPr lang="sv-SE"/>
           </a:p>
@@ -2011,7 +2011,7 @@
           <a:p>
             <a:fld id="{935ADB13-AEC1-AB45-83FA-9336A02F6639}" type="datetimeFigureOut">
               <a:rPr lang="sv-SE" smtClean="0"/>
-              <a:t>2025-04-24</a:t>
+              <a:t>2026-02-26</a:t>
             </a:fld>
             <a:endParaRPr lang="sv-SE"/>
           </a:p>
@@ -2286,7 +2286,7 @@
           <a:p>
             <a:fld id="{935ADB13-AEC1-AB45-83FA-9336A02F6639}" type="datetimeFigureOut">
               <a:rPr lang="sv-SE" smtClean="0"/>
-              <a:t>2025-04-24</a:t>
+              <a:t>2026-02-26</a:t>
             </a:fld>
             <a:endParaRPr lang="sv-SE"/>
           </a:p>
@@ -2538,7 +2538,7 @@
           <a:p>
             <a:fld id="{935ADB13-AEC1-AB45-83FA-9336A02F6639}" type="datetimeFigureOut">
               <a:rPr lang="sv-SE" smtClean="0"/>
-              <a:t>2025-04-24</a:t>
+              <a:t>2026-02-26</a:t>
             </a:fld>
             <a:endParaRPr lang="sv-SE"/>
           </a:p>
@@ -2749,7 +2749,7 @@
           <a:p>
             <a:fld id="{935ADB13-AEC1-AB45-83FA-9336A02F6639}" type="datetimeFigureOut">
               <a:rPr lang="sv-SE" smtClean="0"/>
-              <a:t>2025-04-24</a:t>
+              <a:t>2026-02-26</a:t>
             </a:fld>
             <a:endParaRPr lang="sv-SE"/>
           </a:p>
@@ -41374,7 +41374,7 @@
         </p:nvSpPr>
         <p:spPr>
           <a:xfrm>
-            <a:off x="0" y="2044180"/>
+            <a:off x="0" y="2022146"/>
             <a:ext cx="9144000" cy="3154709"/>
           </a:xfrm>
           <a:prstGeom prst="rect">
@@ -42597,8 +42597,8 @@
         </p:nvSpPr>
         <p:spPr>
           <a:xfrm>
-            <a:off x="4321848" y="1996794"/>
-            <a:ext cx="4822152" cy="3308598"/>
+            <a:off x="4321848" y="1875607"/>
+            <a:ext cx="4822152" cy="3985706"/>
           </a:xfrm>
           <a:prstGeom prst="rect">
             <a:avLst/>
@@ -43429,6 +43429,42 @@
               </a:rPr>
               <a:t>!</a:t>
             </a:r>
+          </a:p>
+          <a:p>
+            <a:endParaRPr lang="sv-SE" sz="1100" dirty="0">
+              <a:solidFill>
+                <a:srgbClr val="FF0000"/>
+              </a:solidFill>
+              <a:latin typeface="Courier"/>
+              <a:cs typeface="Courier"/>
+            </a:endParaRPr>
+          </a:p>
+          <a:p>
+            <a:endParaRPr lang="sv-SE" sz="1100" dirty="0">
+              <a:solidFill>
+                <a:srgbClr val="FF0000"/>
+              </a:solidFill>
+              <a:latin typeface="Courier"/>
+              <a:cs typeface="Courier"/>
+            </a:endParaRPr>
+          </a:p>
+          <a:p>
+            <a:endParaRPr lang="sv-SE" sz="1100" dirty="0">
+              <a:solidFill>
+                <a:srgbClr val="FF0000"/>
+              </a:solidFill>
+              <a:latin typeface="Courier"/>
+              <a:cs typeface="Courier"/>
+            </a:endParaRPr>
+          </a:p>
+          <a:p>
+            <a:endParaRPr lang="sv-SE" sz="1100" dirty="0">
+              <a:solidFill>
+                <a:srgbClr val="FF0000"/>
+              </a:solidFill>
+              <a:latin typeface="Courier"/>
+              <a:cs typeface="Courier"/>
+            </a:endParaRPr>
           </a:p>
           <a:p>
             <a:r>
